--- a/Weekly Reports/Week 4/Self-Driving-RC-Car - Week 4.pptx
+++ b/Weekly Reports/Week 4/Self-Driving-RC-Car - Week 4.pptx
@@ -5,8 +5,11 @@
     <p:sldMasterId id="2147483648" r:id="rId1"/>
   </p:sldMasterIdLst>
   <p:sldIdLst>
-    <p:sldId id="256" r:id="rId2"/>
-    <p:sldId id="257" r:id="rId3"/>
+    <p:sldId id="256" r:id="rId5"/>
+    <p:sldId id="257" r:id="rId4"/>
+    <p:sldId id="258" r:id="rId3"/>
+    <p:sldId id="259" r:id="rId2"/>
+    <p:sldId id="260" r:id="rId10"/>
   </p:sldIdLst>
   <p:sldSz cx="12192000" cy="6858000"/>
   <p:notesSz cx="6858000" cy="9144000"/>
@@ -105,6 +108,11 @@
       </a:defRPr>
     </a:lvl9pPr>
   </p:defaultTextStyle>
+  <p:extLst>
+    <p:ext uri="{EFAFB233-063F-42B5-8137-9DF3F51BA10A}">
+      <p15:sldGuideLst xmlns:p15="http://schemas.microsoft.com/office/powerpoint/2012/main"/>
+    </p:ext>
+  </p:extLst>
 </p:presentation>
 </file>
 
@@ -255,7 +263,7 @@
           <a:p>
             <a:fld id="{752E6B35-DAD5-CF47-9E65-9CA12B499D8C}" type="datetimeFigureOut">
               <a:rPr lang="en-US" smtClean="0"/>
-              <a:t>9/10/26</a:t>
+              <a:t>9/14/2026</a:t>
             </a:fld>
             <a:endParaRPr lang="en-US"/>
           </a:p>
@@ -453,7 +461,7 @@
           <a:p>
             <a:fld id="{752E6B35-DAD5-CF47-9E65-9CA12B499D8C}" type="datetimeFigureOut">
               <a:rPr lang="en-US" smtClean="0"/>
-              <a:t>9/10/26</a:t>
+              <a:t>9/14/2026</a:t>
             </a:fld>
             <a:endParaRPr lang="en-US"/>
           </a:p>
@@ -661,7 +669,7 @@
           <a:p>
             <a:fld id="{752E6B35-DAD5-CF47-9E65-9CA12B499D8C}" type="datetimeFigureOut">
               <a:rPr lang="en-US" smtClean="0"/>
-              <a:t>9/10/26</a:t>
+              <a:t>9/14/2026</a:t>
             </a:fld>
             <a:endParaRPr lang="en-US"/>
           </a:p>
@@ -859,7 +867,7 @@
           <a:p>
             <a:fld id="{752E6B35-DAD5-CF47-9E65-9CA12B499D8C}" type="datetimeFigureOut">
               <a:rPr lang="en-US" smtClean="0"/>
-              <a:t>9/10/26</a:t>
+              <a:t>9/14/2026</a:t>
             </a:fld>
             <a:endParaRPr lang="en-US"/>
           </a:p>
@@ -1134,7 +1142,7 @@
           <a:p>
             <a:fld id="{752E6B35-DAD5-CF47-9E65-9CA12B499D8C}" type="datetimeFigureOut">
               <a:rPr lang="en-US" smtClean="0"/>
-              <a:t>9/10/26</a:t>
+              <a:t>9/14/2026</a:t>
             </a:fld>
             <a:endParaRPr lang="en-US"/>
           </a:p>
@@ -1399,7 +1407,7 @@
           <a:p>
             <a:fld id="{752E6B35-DAD5-CF47-9E65-9CA12B499D8C}" type="datetimeFigureOut">
               <a:rPr lang="en-US" smtClean="0"/>
-              <a:t>9/10/26</a:t>
+              <a:t>9/14/2026</a:t>
             </a:fld>
             <a:endParaRPr lang="en-US"/>
           </a:p>
@@ -1811,7 +1819,7 @@
           <a:p>
             <a:fld id="{752E6B35-DAD5-CF47-9E65-9CA12B499D8C}" type="datetimeFigureOut">
               <a:rPr lang="en-US" smtClean="0"/>
-              <a:t>9/10/26</a:t>
+              <a:t>9/14/2026</a:t>
             </a:fld>
             <a:endParaRPr lang="en-US"/>
           </a:p>
@@ -1952,7 +1960,7 @@
           <a:p>
             <a:fld id="{752E6B35-DAD5-CF47-9E65-9CA12B499D8C}" type="datetimeFigureOut">
               <a:rPr lang="en-US" smtClean="0"/>
-              <a:t>9/10/26</a:t>
+              <a:t>9/14/2026</a:t>
             </a:fld>
             <a:endParaRPr lang="en-US"/>
           </a:p>
@@ -2065,7 +2073,7 @@
           <a:p>
             <a:fld id="{752E6B35-DAD5-CF47-9E65-9CA12B499D8C}" type="datetimeFigureOut">
               <a:rPr lang="en-US" smtClean="0"/>
-              <a:t>9/10/26</a:t>
+              <a:t>9/14/2026</a:t>
             </a:fld>
             <a:endParaRPr lang="en-US"/>
           </a:p>
@@ -2376,7 +2384,7 @@
           <a:p>
             <a:fld id="{752E6B35-DAD5-CF47-9E65-9CA12B499D8C}" type="datetimeFigureOut">
               <a:rPr lang="en-US" smtClean="0"/>
-              <a:t>9/10/26</a:t>
+              <a:t>9/14/2026</a:t>
             </a:fld>
             <a:endParaRPr lang="en-US"/>
           </a:p>
@@ -2664,7 +2672,7 @@
           <a:p>
             <a:fld id="{752E6B35-DAD5-CF47-9E65-9CA12B499D8C}" type="datetimeFigureOut">
               <a:rPr lang="en-US" smtClean="0"/>
-              <a:t>9/10/26</a:t>
+              <a:t>9/14/2026</a:t>
             </a:fld>
             <a:endParaRPr lang="en-US"/>
           </a:p>
@@ -2905,7 +2913,7 @@
           <a:p>
             <a:fld id="{752E6B35-DAD5-CF47-9E65-9CA12B499D8C}" type="datetimeFigureOut">
               <a:rPr lang="en-US" smtClean="0"/>
-              <a:t>9/10/26</a:t>
+              <a:t>9/14/2026</a:t>
             </a:fld>
             <a:endParaRPr lang="en-US"/>
           </a:p>
@@ -3306,7 +3314,7 @@
 </file>
 
 <file path=ppt/slides/slide1.xml><?xml version="1.0" encoding="utf-8"?>
-<p:sld xmlns:a="http://schemas.openxmlformats.org/drawingml/2006/main" xmlns:r="http://schemas.openxmlformats.org/officeDocument/2006/relationships" xmlns:p="http://schemas.openxmlformats.org/presentationml/2006/main">
+<p:sld xmlns:a="http://schemas.openxmlformats.org/drawingml/2006/main" xmlns:p="http://schemas.openxmlformats.org/presentationml/2006/main" xmlns:r="http://schemas.openxmlformats.org/officeDocument/2006/relationships">
   <p:cSld>
     <p:spTree>
       <p:nvGrpSpPr>
@@ -3314,14 +3322,7 @@
         <p:cNvGrpSpPr/>
         <p:nvPr/>
       </p:nvGrpSpPr>
-      <p:grpSpPr>
-        <a:xfrm>
-          <a:off x="0" y="0"/>
-          <a:ext cx="0" cy="0"/>
-          <a:chOff x="0" y="0"/>
-          <a:chExt cx="0" cy="0"/>
-        </a:xfrm>
-      </p:grpSpPr>
+      <p:grpSpPr/>
       <p:sp>
         <p:nvSpPr>
           <p:cNvPr id="2" name="Title 1">
@@ -3399,11 +3400,6 @@
         </p:txBody>
       </p:sp>
     </p:spTree>
-    <p:extLst>
-      <p:ext uri="{BB962C8B-B14F-4D97-AF65-F5344CB8AC3E}">
-        <p14:creationId xmlns:p14="http://schemas.microsoft.com/office/powerpoint/2010/main" val="2087002903"/>
-      </p:ext>
-    </p:extLst>
   </p:cSld>
   <p:clrMapOvr>
     <a:masterClrMapping/>
@@ -3412,7 +3408,7 @@
 </file>
 
 <file path=ppt/slides/slide2.xml><?xml version="1.0" encoding="utf-8"?>
-<p:sld xmlns:a="http://schemas.openxmlformats.org/drawingml/2006/main" xmlns:r="http://schemas.openxmlformats.org/officeDocument/2006/relationships" xmlns:p="http://schemas.openxmlformats.org/presentationml/2006/main">
+<p:sld xmlns:a="http://schemas.openxmlformats.org/drawingml/2006/main" xmlns:p="http://schemas.openxmlformats.org/presentationml/2006/main" xmlns:r="http://schemas.openxmlformats.org/officeDocument/2006/relationships">
   <p:cSld>
     <p:spTree>
       <p:nvGrpSpPr>
@@ -3420,14 +3416,7 @@
         <p:cNvGrpSpPr/>
         <p:nvPr/>
       </p:nvGrpSpPr>
-      <p:grpSpPr>
-        <a:xfrm>
-          <a:off x="0" y="0"/>
-          <a:ext cx="0" cy="0"/>
-          <a:chOff x="0" y="0"/>
-          <a:chExt cx="0" cy="0"/>
-        </a:xfrm>
-      </p:grpSpPr>
+      <p:grpSpPr/>
       <p:sp>
         <p:nvSpPr>
           <p:cNvPr id="2" name="Title 1">
@@ -3472,21 +3461,634 @@
             <p:ph idx="1"/>
           </p:nvPr>
         </p:nvSpPr>
-        <p:spPr/>
-        <p:txBody>
-          <a:bodyPr/>
-          <a:lstStyle/>
-          <a:p>
+        <p:spPr>
+          <a:xfrm>
+            <a:off x="838200" y="1580298"/>
+            <a:ext cx="10515600" cy="4351338"/>
+          </a:xfrm>
+        </p:spPr>
+        <p:txBody>
+          <a:bodyPr>
+            <a:normAutofit fontScale="85000" lnSpcReduction="20000"/>
+          </a:bodyPr>
+          <a:lstStyle/>
+          <a:p>
+            <a:r>
+              <a:rPr b="1" dirty="0"/>
+              <a:t>Goals for the week</a:t>
+            </a:r>
             <a:endParaRPr lang="en-US" dirty="0"/>
           </a:p>
+          <a:p>
+            <a:pPr lvl="1"/>
+            <a:r>
+              <a:rPr dirty="0"/>
+              <a:t>Train the traffic-sign model in TensorFlow on the German dataset (GTSRB) and push the training code to the repo.</a:t>
+            </a:r>
+          </a:p>
+          <a:p>
+            <a:r>
+              <a:rPr b="1" dirty="0"/>
+              <a:t>Progress for the week</a:t>
+            </a:r>
+          </a:p>
+          <a:p>
+            <a:pPr lvl="1"/>
+            <a:r>
+              <a:rPr dirty="0"/>
+              <a:t>Trained a CNN on GTSRB, reaching ~95% validation accuracy.</a:t>
+            </a:r>
+          </a:p>
+          <a:p>
+            <a:pPr lvl="1"/>
+            <a:r>
+              <a:rPr dirty="0"/>
+              <a:t>Committed the trained model (</a:t>
+            </a:r>
+            <a:r>
+              <a:rPr dirty="0" err="1"/>
+              <a:t>gtsrb_model.keras</a:t>
+            </a:r>
+            <a:r>
+              <a:rPr dirty="0"/>
+              <a:t>) and the training script (training.py).</a:t>
+            </a:r>
+          </a:p>
+          <a:p>
+            <a:pPr lvl="1"/>
+            <a:r>
+              <a:rPr dirty="0"/>
+              <a:t>Set up a Python 3.12 environment (TensorFlow has no wheels for 3.13/3.14 yet).</a:t>
+            </a:r>
+          </a:p>
+          <a:p>
+            <a:pPr lvl="1"/>
+            <a:r>
+              <a:rPr dirty="0"/>
+              <a:t>Ordered the CR2032 RTC battery and the KIOXIA 128 GB </a:t>
+            </a:r>
+            <a:r>
+              <a:rPr dirty="0" err="1"/>
+              <a:t>NVMe</a:t>
+            </a:r>
+            <a:r>
+              <a:rPr dirty="0"/>
+              <a:t> boot SSD, plus the USB </a:t>
+            </a:r>
+            <a:r>
+              <a:rPr dirty="0" err="1"/>
+              <a:t>NVMe</a:t>
+            </a:r>
+            <a:r>
+              <a:rPr dirty="0"/>
+              <a:t> enclosure to flash it — the enclosure has arrived; the SSD and battery are still in transit.</a:t>
+            </a:r>
+          </a:p>
+          <a:p>
+            <a:r>
+              <a:rPr b="1" dirty="0"/>
+              <a:t>Goals for next week</a:t>
+            </a:r>
+          </a:p>
+          <a:p>
+            <a:pPr lvl="1"/>
+            <a:r>
+              <a:rPr dirty="0"/>
+              <a:t>Prepare the LISA dataset (US traffic signs) for training.</a:t>
+            </a:r>
+          </a:p>
+          <a:p>
+            <a:r>
+              <a:rPr b="1" dirty="0"/>
+              <a:t>Hours spent on progress</a:t>
+            </a:r>
+          </a:p>
+          <a:p>
+            <a:pPr lvl="1"/>
+            <a:r>
+              <a:rPr dirty="0"/>
+              <a:t>7 hours.</a:t>
+            </a:r>
+          </a:p>
         </p:txBody>
       </p:sp>
     </p:spTree>
-    <p:extLst>
-      <p:ext uri="{BB962C8B-B14F-4D97-AF65-F5344CB8AC3E}">
-        <p14:creationId xmlns:p14="http://schemas.microsoft.com/office/powerpoint/2010/main" val="2943549623"/>
-      </p:ext>
-    </p:extLst>
+  </p:cSld>
+  <p:clrMapOvr>
+    <a:masterClrMapping/>
+  </p:clrMapOvr>
+</p:sld>
+</file>
+
+<file path=ppt/slides/slide3.xml><?xml version="1.0" encoding="utf-8"?>
+<p:sld xmlns:a="http://schemas.openxmlformats.org/drawingml/2006/main" xmlns:p="http://schemas.openxmlformats.org/presentationml/2006/main" xmlns:r="http://schemas.openxmlformats.org/officeDocument/2006/relationships">
+  <p:cSld>
+    <p:spTree>
+      <p:nvGrpSpPr>
+        <p:cNvPr id="1" name=""/>
+        <p:cNvGrpSpPr/>
+        <p:nvPr/>
+      </p:nvGrpSpPr>
+      <p:grpSpPr/>
+      <p:sp>
+        <p:nvSpPr>
+          <p:cNvPr id="2" name="Title 1">
+            <a:extLst>
+              <a:ext uri="{FF2B5EF4-FFF2-40B4-BE49-F238E27FC236}">
+                <a16:creationId xmlns:a16="http://schemas.microsoft.com/office/drawing/2014/main" id="{30AEBF44-7FD5-A705-80AC-D5F6B809A46E}"/>
+              </a:ext>
+            </a:extLst>
+          </p:cNvPr>
+          <p:cNvSpPr>
+            <a:spLocks noGrp="1"/>
+          </p:cNvSpPr>
+          <p:nvPr>
+            <p:ph type="title"/>
+          </p:nvPr>
+        </p:nvSpPr>
+        <p:spPr/>
+        <p:txBody>
+          <a:bodyPr/>
+          <a:lstStyle/>
+          <a:p>
+            <a:r>
+              <a:rPr lang="en-US" dirty="0"/>
+              <a:t>Alexis Perez</a:t>
+            </a:r>
+          </a:p>
+        </p:txBody>
+      </p:sp>
+      <p:sp>
+        <p:nvSpPr>
+          <p:cNvPr id="3" name="Content Placeholder 2">
+            <a:extLst>
+              <a:ext uri="{FF2B5EF4-FFF2-40B4-BE49-F238E27FC236}">
+                <a16:creationId xmlns:a16="http://schemas.microsoft.com/office/drawing/2014/main" id="{3F6BF837-7A7D-A6A3-574B-020760331940}"/>
+              </a:ext>
+            </a:extLst>
+          </p:cNvPr>
+          <p:cNvSpPr>
+            <a:spLocks noGrp="1"/>
+          </p:cNvSpPr>
+          <p:nvPr>
+            <p:ph idx="1"/>
+          </p:nvPr>
+        </p:nvSpPr>
+        <p:spPr/>
+        <p:txBody>
+          <a:bodyPr>
+            <a:normAutofit lnSpcReduction="10000"/>
+          </a:bodyPr>
+          <a:lstStyle/>
+          <a:p>
+            <a:r>
+              <a:rPr lang="en-US" b="1" dirty="0"/>
+              <a:t>Goals for the week</a:t>
+            </a:r>
+          </a:p>
+          <a:p>
+            <a:pPr lvl="1"/>
+            <a:r>
+              <a:rPr lang="en-US" dirty="0"/>
+              <a:t>Test Ultrasonic Sensor for Distance, Accuracy, and operational range</a:t>
+            </a:r>
+          </a:p>
+          <a:p>
+            <a:pPr lvl="1"/>
+            <a:r>
+              <a:rPr lang="en-US" dirty="0"/>
+              <a:t>Research Motor options for Vehicle</a:t>
+            </a:r>
+          </a:p>
+          <a:p>
+            <a:r>
+              <a:rPr lang="en-US" b="1" dirty="0"/>
+              <a:t>Progress for the week</a:t>
+            </a:r>
+          </a:p>
+          <a:p>
+            <a:pPr lvl="1"/>
+            <a:r>
+              <a:rPr lang="en-US" dirty="0"/>
+              <a:t>Tested Ultrasonic Sensor’s distance readings and measurement accuracy</a:t>
+            </a:r>
+          </a:p>
+          <a:p>
+            <a:pPr lvl="1"/>
+            <a:r>
+              <a:rPr lang="en-US" dirty="0"/>
+              <a:t>Researched motors for most optimal option for  vehicle</a:t>
+            </a:r>
+          </a:p>
+          <a:p>
+            <a:r>
+              <a:rPr lang="en-US" b="1" dirty="0"/>
+              <a:t>Goals for next week</a:t>
+            </a:r>
+          </a:p>
+          <a:p>
+            <a:pPr lvl="1"/>
+            <a:r>
+              <a:rPr lang="en-US" dirty="0"/>
+              <a:t>Select and Order motors</a:t>
+            </a:r>
+          </a:p>
+          <a:p>
+            <a:pPr lvl="1"/>
+            <a:r>
+              <a:rPr lang="en-US" dirty="0"/>
+              <a:t>Write code to integrate Ultrasonic Sensor onto </a:t>
+            </a:r>
+            <a:r>
+              <a:rPr lang="en-US" dirty="0" err="1"/>
+              <a:t>RaspberryPi</a:t>
+            </a:r>
+            <a:endParaRPr lang="en-US" dirty="0"/>
+          </a:p>
+          <a:p>
+            <a:r>
+              <a:rPr lang="en-US" b="1" dirty="0"/>
+              <a:t>Hours spent on progress</a:t>
+            </a:r>
+          </a:p>
+          <a:p>
+            <a:pPr lvl="1"/>
+            <a:r>
+              <a:rPr lang="en-US" dirty="0"/>
+              <a:t>6 hours.</a:t>
+            </a:r>
+          </a:p>
+          <a:p>
+            <a:endParaRPr lang="en-US" dirty="0"/>
+          </a:p>
+        </p:txBody>
+      </p:sp>
+    </p:spTree>
+  </p:cSld>
+  <p:clrMapOvr>
+    <a:masterClrMapping/>
+  </p:clrMapOvr>
+</p:sld>
+</file>
+
+<file path=ppt/slides/slide4.xml><?xml version="1.0" encoding="utf-8"?>
+<p:sld xmlns:a="http://schemas.openxmlformats.org/drawingml/2006/main" xmlns:p="http://schemas.openxmlformats.org/presentationml/2006/main" xmlns:r="http://schemas.openxmlformats.org/officeDocument/2006/relationships">
+  <p:cSld>
+    <p:spTree>
+      <p:nvGrpSpPr>
+        <p:cNvPr id="1" name=""/>
+        <p:cNvGrpSpPr/>
+        <p:nvPr/>
+      </p:nvGrpSpPr>
+      <p:grpSpPr/>
+      <p:sp>
+        <p:nvSpPr>
+          <p:cNvPr id="2" name="Title 1">
+            <a:extLst>
+              <a:ext uri="{FF2B5EF4-FFF2-40B4-BE49-F238E27FC236}">
+                <a16:creationId xmlns:a16="http://schemas.microsoft.com/office/drawing/2014/main" id="{7424A086-AE83-6431-D3A6-AD69F5E4DA99}"/>
+              </a:ext>
+            </a:extLst>
+          </p:cNvPr>
+          <p:cNvSpPr>
+            <a:spLocks noGrp="1"/>
+          </p:cNvSpPr>
+          <p:nvPr>
+            <p:ph type="title"/>
+          </p:nvPr>
+        </p:nvSpPr>
+        <p:spPr/>
+        <p:txBody>
+          <a:bodyPr/>
+          <a:lstStyle/>
+          <a:p>
+            <a:r>
+              <a:rPr lang="en-US" dirty="0"/>
+              <a:t>Ethan Bishop</a:t>
+            </a:r>
+          </a:p>
+        </p:txBody>
+      </p:sp>
+      <p:sp>
+        <p:nvSpPr>
+          <p:cNvPr id="3" name="Content Placeholder 2">
+            <a:extLst>
+              <a:ext uri="{FF2B5EF4-FFF2-40B4-BE49-F238E27FC236}">
+                <a16:creationId xmlns:a16="http://schemas.microsoft.com/office/drawing/2014/main" id="{E21CE5BE-C8C4-DF75-0622-1767719853DF}"/>
+              </a:ext>
+            </a:extLst>
+          </p:cNvPr>
+          <p:cNvSpPr>
+            <a:spLocks noGrp="1"/>
+          </p:cNvSpPr>
+          <p:nvPr>
+            <p:ph idx="1"/>
+          </p:nvPr>
+        </p:nvSpPr>
+        <p:spPr>
+          <a:xfrm>
+            <a:off x="838200" y="1580298"/>
+            <a:ext cx="10515600" cy="4299294"/>
+          </a:xfrm>
+        </p:spPr>
+        <p:txBody>
+          <a:bodyPr>
+            <a:normAutofit fontScale="92500" lnSpcReduction="20000"/>
+          </a:bodyPr>
+          <a:lstStyle/>
+          <a:p>
+            <a:r>
+              <a:rPr b="1" dirty="0"/>
+              <a:t>Goals for the week</a:t>
+            </a:r>
+            <a:endParaRPr lang="en-US" dirty="0"/>
+          </a:p>
+          <a:p>
+            <a:pPr lvl="1"/>
+            <a:r>
+              <a:rPr lang="en-US" dirty="0"/>
+              <a:t>Test IMU for Accuracy</a:t>
+            </a:r>
+          </a:p>
+          <a:p>
+            <a:pPr lvl="1"/>
+            <a:r>
+              <a:rPr lang="en-US" dirty="0"/>
+              <a:t>Research Motor Controller options</a:t>
+            </a:r>
+          </a:p>
+          <a:p>
+            <a:pPr lvl="1"/>
+            <a:r>
+              <a:rPr lang="en-US" dirty="0"/>
+              <a:t>Set up home 3D printer to test chassis components</a:t>
+            </a:r>
+          </a:p>
+          <a:p>
+            <a:r>
+              <a:rPr b="1" dirty="0"/>
+              <a:t>Progress for the week</a:t>
+            </a:r>
+          </a:p>
+          <a:p>
+            <a:pPr lvl="1"/>
+            <a:r>
+              <a:rPr lang="en-US" dirty="0"/>
+              <a:t>Tested IMU for measurement accuracy</a:t>
+            </a:r>
+          </a:p>
+          <a:p>
+            <a:pPr lvl="1"/>
+            <a:r>
+              <a:rPr lang="en-US" dirty="0"/>
+              <a:t>Researched Motor Controller for most optimal option</a:t>
+            </a:r>
+          </a:p>
+          <a:p>
+            <a:pPr lvl="1"/>
+            <a:r>
+              <a:rPr lang="en-US" dirty="0"/>
+              <a:t>Drying out filament for chassis component testing</a:t>
+            </a:r>
+          </a:p>
+          <a:p>
+            <a:r>
+              <a:rPr b="1" dirty="0"/>
+              <a:t>Goals for next week</a:t>
+            </a:r>
+          </a:p>
+          <a:p>
+            <a:pPr lvl="1"/>
+            <a:r>
+              <a:rPr lang="en-US" dirty="0"/>
+              <a:t>Select and </a:t>
+            </a:r>
+            <a:r>
+              <a:rPr lang="en-US"/>
+              <a:t>order Motor </a:t>
+            </a:r>
+            <a:r>
+              <a:rPr lang="en-US" dirty="0"/>
+              <a:t>Controller</a:t>
+            </a:r>
+          </a:p>
+          <a:p>
+            <a:pPr lvl="1"/>
+            <a:r>
+              <a:rPr lang="en-US" dirty="0"/>
+              <a:t>Write code to integrate IMU onto </a:t>
+            </a:r>
+            <a:r>
+              <a:rPr lang="en-US" dirty="0" err="1"/>
+              <a:t>RaspberryPi</a:t>
+            </a:r>
+            <a:endParaRPr lang="en-US" dirty="0"/>
+          </a:p>
+          <a:p>
+            <a:r>
+              <a:rPr b="1" dirty="0"/>
+              <a:t>Hours spent on progress</a:t>
+            </a:r>
+          </a:p>
+          <a:p>
+            <a:pPr lvl="1"/>
+            <a:r>
+              <a:rPr lang="en-US" dirty="0"/>
+              <a:t>6</a:t>
+            </a:r>
+            <a:r>
+              <a:rPr dirty="0"/>
+              <a:t> hours.</a:t>
+            </a:r>
+          </a:p>
+        </p:txBody>
+      </p:sp>
+    </p:spTree>
+  </p:cSld>
+  <p:clrMapOvr>
+    <a:masterClrMapping/>
+  </p:clrMapOvr>
+</p:sld>
+</file>
+
+<file path=ppt/slides/slide5.xml><?xml version="1.0" encoding="utf-8"?>
+<p:sld xmlns:a="http://schemas.openxmlformats.org/drawingml/2006/main" xmlns:p="http://schemas.openxmlformats.org/presentationml/2006/main" xmlns:r="http://schemas.openxmlformats.org/officeDocument/2006/relationships">
+  <p:cSld>
+    <p:spTree>
+      <p:nvGrpSpPr>
+        <p:cNvPr id="1" name=""/>
+        <p:cNvGrpSpPr/>
+        <p:nvPr/>
+      </p:nvGrpSpPr>
+      <p:grpSpPr/>
+      <p:sp>
+        <p:nvSpPr>
+          <p:cNvPr id="2" name="Title 1">
+            <a:extLst>
+              <a:ext uri="{FF2B5EF4-FFF2-40B4-BE49-F238E27FC236}">
+                <a16:creationId xmlns:a16="http://schemas.microsoft.com/office/drawing/2014/main" id="{6D259182-6FD3-6E62-0AC1-D7F9A089FCBC}"/>
+              </a:ext>
+            </a:extLst>
+          </p:cNvPr>
+          <p:cNvSpPr>
+            <a:spLocks noGrp="1"/>
+          </p:cNvSpPr>
+          <p:nvPr>
+            <p:ph type="title"/>
+          </p:nvPr>
+        </p:nvSpPr>
+        <p:spPr/>
+        <p:txBody>
+          <a:bodyPr/>
+          <a:lstStyle/>
+          <a:p>
+            <a:r>
+              <a:t>Abigail Duran</a:t>
+            </a:r>
+          </a:p>
+        </p:txBody>
+      </p:sp>
+      <p:sp>
+        <p:nvSpPr>
+          <p:cNvPr id="3" name="Content Placeholder 2">
+            <a:extLst>
+              <a:ext uri="{FF2B5EF4-FFF2-40B4-BE49-F238E27FC236}">
+                <a16:creationId xmlns:a16="http://schemas.microsoft.com/office/drawing/2014/main" id="{A7A8531B-14FC-040D-A94D-6293C4D3F000}"/>
+              </a:ext>
+            </a:extLst>
+          </p:cNvPr>
+          <p:cNvSpPr>
+            <a:spLocks noGrp="1"/>
+          </p:cNvSpPr>
+          <p:nvPr>
+            <p:ph idx="1"/>
+          </p:nvPr>
+        </p:nvSpPr>
+        <p:spPr>
+          <a:xfrm>
+            <a:off x="838200" y="1580298"/>
+            <a:ext cx="10515600" cy="4351338"/>
+          </a:xfrm>
+        </p:spPr>
+        <p:txBody>
+          <a:bodyPr>
+            <a:normAutofit fontScale="62500" lnSpcReduction="20000"/>
+          </a:bodyPr>
+          <a:lstStyle/>
+          <a:p>
+            <a:r>
+              <a:rPr b="1" dirty="0"/>
+              <a:t>Goals for the week</a:t>
+            </a:r>
+            <a:endParaRPr lang="en-US" b="1" dirty="0"/>
+          </a:p>
+          <a:p>
+            <a:pPr lvl="1"/>
+            <a:r>
+              <a:rPr lang="en-US" dirty="0"/>
+              <a:t>Finalize the list of PCB requirements for the stationary testing system.​</a:t>
+            </a:r>
+          </a:p>
+          <a:p>
+            <a:pPr lvl="1"/>
+            <a:r>
+              <a:rPr lang="en-US" dirty="0"/>
+              <a:t>Determine the major components, connections, and power requirements needed for PCB design.​</a:t>
+            </a:r>
+          </a:p>
+          <a:p>
+            <a:pPr lvl="1"/>
+            <a:endParaRPr lang="en-US" dirty="0"/>
+          </a:p>
+          <a:p>
+            <a:r>
+              <a:rPr b="1" dirty="0"/>
+              <a:t>Progress for the week</a:t>
+            </a:r>
+          </a:p>
+          <a:p>
+            <a:pPr lvl="1"/>
+            <a:r>
+              <a:rPr lang="en-US" dirty="0"/>
+              <a:t>Completed the first-semester schematic for stationary testing of the autonomous car system.​</a:t>
+            </a:r>
+          </a:p>
+          <a:p>
+            <a:pPr lvl="1"/>
+            <a:r>
+              <a:rPr lang="en-US" dirty="0"/>
+              <a:t>Built and refined the schematic around the Raspberry Pi Compute Module 5.​</a:t>
+            </a:r>
+          </a:p>
+          <a:p>
+            <a:pPr lvl="1"/>
+            <a:r>
+              <a:rPr lang="en-US" dirty="0"/>
+              <a:t>Resolved schematic/ERC issues and prepared the design for PCB development.​</a:t>
+            </a:r>
+          </a:p>
+          <a:p>
+            <a:pPr lvl="1"/>
+            <a:r>
+              <a:rPr lang="en-US" dirty="0"/>
+              <a:t>Began hardware prototyping for the stationary testing setup.​</a:t>
+            </a:r>
+          </a:p>
+          <a:p>
+            <a:pPr lvl="1"/>
+            <a:endParaRPr b="1" dirty="0"/>
+          </a:p>
+          <a:p>
+            <a:r>
+              <a:rPr b="1" dirty="0"/>
+              <a:t>Goals for next week</a:t>
+            </a:r>
+          </a:p>
+          <a:p>
+            <a:pPr lvl="1"/>
+            <a:r>
+              <a:rPr lang="en-US" dirty="0"/>
+              <a:t>Begin the PCB design and layout using the completed schematic.​</a:t>
+            </a:r>
+          </a:p>
+          <a:p>
+            <a:pPr lvl="1"/>
+            <a:r>
+              <a:rPr lang="en-US" dirty="0"/>
+              <a:t>Start placing major components and determining board dimensions.​</a:t>
+            </a:r>
+          </a:p>
+          <a:p>
+            <a:pPr lvl="1"/>
+            <a:r>
+              <a:rPr lang="en-US" dirty="0"/>
+              <a:t>Begin planning power and signal routing.​</a:t>
+            </a:r>
+          </a:p>
+          <a:p>
+            <a:pPr lvl="1"/>
+            <a:endParaRPr b="1" dirty="0"/>
+          </a:p>
+          <a:p>
+            <a:r>
+              <a:rPr b="1" dirty="0"/>
+              <a:t>Hours spent on progress</a:t>
+            </a:r>
+          </a:p>
+          <a:p>
+            <a:pPr lvl="1"/>
+            <a:r>
+              <a:rPr lang="en-US" dirty="0"/>
+              <a:t>6 hours​</a:t>
+            </a:r>
+          </a:p>
+          <a:p>
+            <a:pPr lvl="1"/>
+            <a:endParaRPr b="1" dirty="0"/>
+          </a:p>
+        </p:txBody>
+      </p:sp>
+    </p:spTree>
   </p:cSld>
   <p:clrMapOvr>
     <a:masterClrMapping/>

--- a/Weekly Reports/Week 4/Self-Driving-RC-Car - Week 4.pptx
+++ b/Weekly Reports/Week 4/Self-Driving-RC-Car - Week 4.pptx
@@ -3555,6 +3555,13 @@
             <a:r>
               <a:rPr dirty="0"/>
               <a:t>Prepare the LISA dataset (US traffic signs) for training.</a:t>
+            </a:r>
+          </a:p>
+          <a:p>
+            <a:pPr lvl="1"/>
+            <a:r>
+              <a:rPr dirty="0"/>
+              <a:t>Test the trained German-sign (GTSRB) model.</a:t>
             </a:r>
           </a:p>
           <a:p>
